--- a/decks/hist-whitechapel/hist-whitechapel_ch1_whitechapel-1880s.pptx
+++ b/decks/hist-whitechapel/hist-whitechapel_ch1_whitechapel-1880s.pptx
@@ -126,30 +126,30 @@
   <p:extLst>
     <p:ext uri="{521415D9-36F7-43E2-AB2F-B90AF26B5E84}">
       <p14:sectionLst xmlns:p14="http://schemas.microsoft.com/office/powerpoint/2010/main">
-        <p14:section name="Opening" id="{6f7f34ce-ff93-254b-2545-62a49de495f9}">
+        <p14:section name="Opening" id="{feb5cdd0-aa21-e63d-2271-8df41e1b62e7}">
           <p14:sldIdLst>
             <p14:sldId id="256"/>
           </p14:sldIdLst>
         </p14:section>
-        <p14:section name="Gate" id="{3151156c-c673-b065-f851-52f10a1b01a3}">
+        <p14:section name="Gate" id="{b080d682-b604-a391-e7c9-7614a7a3adae}">
           <p14:sldIdLst>
             <p14:sldId id="257"/>
             <p14:sldId id="258"/>
           </p14:sldIdLst>
         </p14:section>
-        <p14:section name="Pre-teach" id="{ebb03b96-05b4-4e8c-2d5d-5a6c52c5e2ca}">
+        <p14:section name="Pre-teach" id="{3aa356c3-64b0-1cba-5122-f4b8cc02d381}">
           <p14:sldIdLst>
             <p14:sldId id="259"/>
             <p14:sldId id="260"/>
           </p14:sldIdLst>
         </p14:section>
-        <p14:section name="Read-along" id="{b00bbbe1-a314-457f-2b40-7b1aaf2dd143}">
+        <p14:section name="Read-along" id="{00ebf738-a0a5-aad2-8fa1-a5a7a43c8683}">
           <p14:sldIdLst>
             <p14:sldId id="261"/>
             <p14:sldId id="262"/>
           </p14:sldIdLst>
         </p14:section>
-        <p14:section name="Teach" id="{100bbaa9-6448-87f7-8ec7-e5b6721ea277}">
+        <p14:section name="Teach" id="{d6810d32-62a1-7649-0172-7dbd479a5a02}">
           <p14:sldIdLst>
             <p14:sldId id="263"/>
             <p14:sldId id="264"/>
@@ -157,7 +157,7 @@
             <p14:sldId id="266"/>
           </p14:sldIdLst>
         </p14:section>
-        <p14:section name="Routes" id="{14a66247-b430-e136-1738-120f6767e7f6}">
+        <p14:section name="Routes" id="{5c634858-299d-b9f4-4ee8-88e4265cbbaa}">
           <p14:sldIdLst>
             <p14:sldId id="267"/>
             <p14:sldId id="268"/>
@@ -166,12 +166,12 @@
             <p14:sldId id="271"/>
           </p14:sldIdLst>
         </p14:section>
-        <p14:section name="Close" id="{2731fa00-7a45-c9af-6c88-910003f65f10}">
+        <p14:section name="Close" id="{b7b4e26c-7eb7-6055-ab57-48a0addf87dd}">
           <p14:sldIdLst>
             <p14:sldId id="272"/>
           </p14:sldIdLst>
         </p14:section>
-        <p14:section name="Answers" id="{66cc2494-8657-64b5-7a44-5a54b103effe}">
+        <p14:section name="Answers" id="{897a2c07-71b1-cd73-04ee-632703997acc}">
           <p14:sldIdLst>
             <p14:sldId id="273"/>
             <p14:sldId id="274"/>
